--- a/classes/parte-16-capstones-y-preparacion-de-certificaciones/306-capstone-deteccion-blue-team-end-to-end/clase-306-presentacion.pptx
+++ b/classes/parte-16-capstones-y-preparacion-de-certificaciones/306-capstone-deteccion-blue-team-end-to-end/clase-306-presentacion.pptx
@@ -17,6 +17,10 @@
     <p:sldId id="265" r:id="rId16"/>
     <p:sldId id="266" r:id="rId17"/>
     <p:sldId id="267" r:id="rId18"/>
+    <p:sldId id="268" r:id="rId19"/>
+    <p:sldId id="269" r:id="rId20"/>
+    <p:sldId id="270" r:id="rId21"/>
+    <p:sldId id="271" r:id="rId22"/>
   </p:sldIdLst>
   <p:sldSz cx="9144000" cy="6858000" type="screen4x3"/>
   <p:notesSz cx="6858000" cy="9144000"/>
@@ -3198,7 +3202,7 @@
                   <a:srgbClr val="0B3D2E"/>
                 </a:solidFill>
               </a:rPr>
-              <a:t>⚠️ Errores comunes</a:t>
+              <a:t>🧪 Laboratorio guiado</a:t>
             </a:r>
           </a:p>
         </p:txBody>
@@ -3236,67 +3240,97 @@
                   <a:srgbClr val="22282E"/>
                 </a:solidFill>
               </a:rPr>
-              <a:t>•  "No llegan logs al SIEM" — Agente/forwarder mal configurado; revisa conectividad e índices.</a:t>
-            </a:r>
-          </a:p>
-          <a:p>
-            <a:pPr>
-              <a:spcAft>
-                <a:spcPts val="600"/>
-              </a:spcAft>
-            </a:pPr>
-            <a:r>
-              <a:rPr sz="1500">
-                <a:solidFill>
-                  <a:srgbClr val="22282E"/>
-                </a:solidFill>
-              </a:rPr>
-              <a:t>•  "Sysmon no captura línea de comandos" — Config mínima; usa una config de referencia completa.</a:t>
-            </a:r>
-          </a:p>
-          <a:p>
-            <a:pPr>
-              <a:spcAft>
-                <a:spcPts val="600"/>
-              </a:spcAft>
-            </a:pPr>
-            <a:r>
-              <a:rPr sz="1500">
-                <a:solidFill>
-                  <a:srgbClr val="22282E"/>
-                </a:solidFill>
-              </a:rPr>
-              <a:t>•  "Demasiadas alertas" — Reglas sin ajustar; añade excepciones y umbrales.</a:t>
-            </a:r>
-          </a:p>
-          <a:p>
-            <a:pPr>
-              <a:spcAft>
-                <a:spcPts val="600"/>
-              </a:spcAft>
-            </a:pPr>
-            <a:r>
-              <a:rPr sz="1500">
-                <a:solidFill>
-                  <a:srgbClr val="22282E"/>
-                </a:solidFill>
-              </a:rPr>
-              <a:t>•  "La regla Sigma no traduce" — Backend incorrecto en sigmac; especifica el SIEM destino.</a:t>
-            </a:r>
-          </a:p>
-          <a:p>
-            <a:pPr>
-              <a:spcAft>
-                <a:spcPts val="600"/>
-              </a:spcAft>
-            </a:pPr>
-            <a:r>
-              <a:rPr sz="1500">
-                <a:solidFill>
-                  <a:srgbClr val="22282E"/>
-                </a:solidFill>
-              </a:rPr>
-              <a:t>•  "No detecto nada del ataque" — Telemetría incompleta; verifica qué eventos genera cada técnica.</a:t>
+              <a:t>•  Instrumenta. Despliega Sysmon con una config de referencia en los hosts Windows y auditd con reglas clave en Linux.</a:t>
+            </a:r>
+          </a:p>
+          <a:p>
+            <a:pPr>
+              <a:spcAft>
+                <a:spcPts val="600"/>
+              </a:spcAft>
+            </a:pPr>
+            <a:r>
+              <a:rPr sz="1500">
+                <a:solidFill>
+                  <a:srgbClr val="22282E"/>
+                </a:solidFill>
+              </a:rPr>
+              <a:t>•  Centraliza. Instala Wazuh/Elastic y envía los logs de todos los hosts; verifica la ingesta en Kibana.</a:t>
+            </a:r>
+          </a:p>
+          <a:p>
+            <a:pPr>
+              <a:spcAft>
+                <a:spcPts val="600"/>
+              </a:spcAft>
+            </a:pPr>
+            <a:r>
+              <a:rPr sz="1500">
+                <a:solidFill>
+                  <a:srgbClr val="22282E"/>
+                </a:solidFill>
+              </a:rPr>
+              <a:t>•  Normaliza. Comprueba que campos clave (proceso, línea de comandos, hash, usuario) llegan parseados.</a:t>
+            </a:r>
+          </a:p>
+          <a:p>
+            <a:pPr>
+              <a:spcAft>
+                <a:spcPts val="600"/>
+              </a:spcAft>
+            </a:pPr>
+            <a:r>
+              <a:rPr sz="1500">
+                <a:solidFill>
+                  <a:srgbClr val="22282E"/>
+                </a:solidFill>
+              </a:rPr>
+              <a:t>•  Despliega reglas Sigma. Importa reglas para técnicas del ataque (p. ej. T1059 ejecución por línea de comandos, T1003 volcado de credenciales, T1021 movimiento lateral).</a:t>
+            </a:r>
+          </a:p>
+          <a:p>
+            <a:pPr>
+              <a:spcAft>
+                <a:spcPts val="600"/>
+              </a:spcAft>
+            </a:pPr>
+            <a:r>
+              <a:rPr sz="1500">
+                <a:solidFill>
+                  <a:srgbClr val="22282E"/>
+                </a:solidFill>
+              </a:rPr>
+              <a:t>•  Reproduce el ataque. Vuelve a lanzar (o usa los logs de) la operación Red Team de la Clase 305.</a:t>
+            </a:r>
+          </a:p>
+          <a:p>
+            <a:pPr>
+              <a:spcAft>
+                <a:spcPts val="600"/>
+              </a:spcAft>
+            </a:pPr>
+            <a:r>
+              <a:rPr sz="1500">
+                <a:solidFill>
+                  <a:srgbClr val="22282E"/>
+                </a:solidFill>
+              </a:rPr>
+              <a:t>•  Valida detecciones. Confirma qué técnicas generaron alerta y cuáles pasaron desapercibidas.</a:t>
+            </a:r>
+          </a:p>
+          <a:p>
+            <a:pPr>
+              <a:spcAft>
+                <a:spcPts val="600"/>
+              </a:spcAft>
+            </a:pPr>
+            <a:r>
+              <a:rPr sz="1500">
+                <a:solidFill>
+                  <a:srgbClr val="22282E"/>
+                </a:solidFill>
+              </a:rPr>
+              <a:t>•  Caza lo no detectado. Para las técnicas sin alerta, escribe una query de hunting y, si procede, una regla nueva.</a:t>
             </a:r>
           </a:p>
         </p:txBody>
@@ -3347,7 +3381,7 @@
                   <a:srgbClr val="0B3D2E"/>
                 </a:solidFill>
               </a:rPr>
-              <a:t>❓ Preguntas frecuentes</a:t>
+              <a:t>✍️ Ejercicios</a:t>
             </a:r>
           </a:p>
         </p:txBody>
@@ -3385,97 +3419,82 @@
                   <a:srgbClr val="22282E"/>
                 </a:solidFill>
               </a:rPr>
-              <a:t>•  ❓ ¿Wazuh o Elastic?</a:t>
-            </a:r>
-          </a:p>
-          <a:p>
-            <a:pPr>
-              <a:spcAft>
-                <a:spcPts val="600"/>
-              </a:spcAft>
-            </a:pPr>
-            <a:r>
-              <a:rPr sz="1500">
-                <a:solidFill>
-                  <a:srgbClr val="22282E"/>
-                </a:solidFill>
-              </a:rPr>
-              <a:t>•  Wazuh es más rápido de montar y trae reglas; Elastic es más flexible. Cualquiera vale para el capstone.</a:t>
-            </a:r>
-          </a:p>
-          <a:p>
-            <a:pPr>
-              <a:spcAft>
-                <a:spcPts val="600"/>
-              </a:spcAft>
-            </a:pPr>
-            <a:r>
-              <a:rPr sz="1500">
-                <a:solidFill>
-                  <a:srgbClr val="22282E"/>
-                </a:solidFill>
-              </a:rPr>
-              <a:t>•  ❓ ¿Qué config de Sysmon uso?</a:t>
-            </a:r>
-          </a:p>
-          <a:p>
-            <a:pPr>
-              <a:spcAft>
-                <a:spcPts val="600"/>
-              </a:spcAft>
-            </a:pPr>
-            <a:r>
-              <a:rPr sz="1500">
-                <a:solidFill>
-                  <a:srgbClr val="22282E"/>
-                </a:solidFill>
-              </a:rPr>
-              <a:t>•  Parte de la de SwiftOnSecurity u Olaf Hartong y ajústala; evita la config por defecto (casi vacía).</a:t>
-            </a:r>
-          </a:p>
-          <a:p>
-            <a:pPr>
-              <a:spcAft>
-                <a:spcPts val="600"/>
-              </a:spcAft>
-            </a:pPr>
-            <a:r>
-              <a:rPr sz="1500">
-                <a:solidFill>
-                  <a:srgbClr val="22282E"/>
-                </a:solidFill>
-              </a:rPr>
-              <a:t>•  ❓ ¿Cómo priorizo qué detectar?</a:t>
-            </a:r>
-          </a:p>
-          <a:p>
-            <a:pPr>
-              <a:spcAft>
-                <a:spcPts val="600"/>
-              </a:spcAft>
-            </a:pPr>
-            <a:r>
-              <a:rPr sz="1500">
-                <a:solidFill>
-                  <a:srgbClr val="22282E"/>
-                </a:solidFill>
-              </a:rPr>
-              <a:t>•  Empieza por las técnicas que usaste en la Clase 305 y por las de mayor impacto (ejecución, credenciales, persistencia).</a:t>
-            </a:r>
-          </a:p>
-          <a:p>
-            <a:pPr>
-              <a:spcAft>
-                <a:spcPts val="600"/>
-              </a:spcAft>
-            </a:pPr>
-            <a:r>
-              <a:rPr sz="1500">
-                <a:solidFill>
-                  <a:srgbClr val="22282E"/>
-                </a:solidFill>
-              </a:rPr>
-              <a:t>•  ❓ ¿Detección al 100%?</a:t>
+              <a:t>•  Escribe una regla Sigma para detección de mimikatz/volcado de LSASS.</a:t>
+            </a:r>
+          </a:p>
+          <a:p>
+            <a:pPr>
+              <a:spcAft>
+                <a:spcPts val="600"/>
+              </a:spcAft>
+            </a:pPr>
+            <a:r>
+              <a:rPr sz="1500">
+                <a:solidFill>
+                  <a:srgbClr val="22282E"/>
+                </a:solidFill>
+              </a:rPr>
+              <a:t>•  Ajusta una regla ruidosa para reducir falsos positivos.</a:t>
+            </a:r>
+          </a:p>
+          <a:p>
+            <a:pPr>
+              <a:spcAft>
+                <a:spcPts val="600"/>
+              </a:spcAft>
+            </a:pPr>
+            <a:r>
+              <a:rPr sz="1500">
+                <a:solidFill>
+                  <a:srgbClr val="22282E"/>
+                </a:solidFill>
+              </a:rPr>
+              <a:t>•  Crea un dashboard con las alertas por técnica ATT&amp;CK.</a:t>
+            </a:r>
+          </a:p>
+          <a:p>
+            <a:pPr>
+              <a:spcAft>
+                <a:spcPts val="600"/>
+              </a:spcAft>
+            </a:pPr>
+            <a:r>
+              <a:rPr sz="1500">
+                <a:solidFill>
+                  <a:srgbClr val="22282E"/>
+                </a:solidFill>
+              </a:rPr>
+              <a:t>•  Compara la cobertura antes y después de añadir 3 reglas.</a:t>
+            </a:r>
+          </a:p>
+          <a:p>
+            <a:pPr>
+              <a:spcAft>
+                <a:spcPts val="600"/>
+              </a:spcAft>
+            </a:pPr>
+            <a:r>
+              <a:rPr sz="1500">
+                <a:solidFill>
+                  <a:srgbClr val="22282E"/>
+                </a:solidFill>
+              </a:rPr>
+              <a:t>•  Redacta una query de hunting para movimiento lateral por SMB.</a:t>
+            </a:r>
+          </a:p>
+          <a:p>
+            <a:pPr>
+              <a:spcAft>
+                <a:spcPts val="600"/>
+              </a:spcAft>
+            </a:pPr>
+            <a:r>
+              <a:rPr sz="1500">
+                <a:solidFill>
+                  <a:srgbClr val="22282E"/>
+                </a:solidFill>
+              </a:rPr>
+              <a:t>•  Calcula el MTTD de tres técnicas del ataque.</a:t>
             </a:r>
           </a:p>
         </p:txBody>
@@ -3526,7 +3545,7 @@
                   <a:srgbClr val="0B3D2E"/>
                 </a:solidFill>
               </a:rPr>
-              <a:t>🔗 Referencias</a:t>
+              <a:t>📝 Reto verificable</a:t>
             </a:r>
           </a:p>
         </p:txBody>
@@ -3564,6 +3583,438 @@
                   <a:srgbClr val="22282E"/>
                 </a:solidFill>
               </a:rPr>
+              <a:t>•  Entrega un informe de detección Blue Team (informe-blueteam.md) con: arquitectura de telemetría y SIEM, al menos 5 reglas Sigma desplegadas, la validación contra el ataque de la Clase 305, un mapa de…</a:t>
+            </a:r>
+          </a:p>
+          <a:p>
+            <a:pPr>
+              <a:spcAft>
+                <a:spcPts val="600"/>
+              </a:spcAft>
+            </a:pPr>
+            <a:r>
+              <a:rPr sz="1500">
+                <a:solidFill>
+                  <a:srgbClr val="22282E"/>
+                </a:solidFill>
+              </a:rPr>
+              <a:t>•  Criterio de aceptación: al menos 5 técnicas del ataque están detectadas y evidenciadas con capturas de alerta, el mapa de cobertura distingue detectado/visible/ciego, y hay reglas nuevas escritas…</a:t>
+            </a:r>
+          </a:p>
+        </p:txBody>
+      </p:sp>
+    </p:spTree>
+  </p:cSld>
+  <p:clrMapOvr>
+    <a:masterClrMapping/>
+  </p:clrMapOvr>
+</p:sld>
+</file>
+
+<file path=ppt/slides/slide13.xml><?xml version="1.0" encoding="utf-8"?>
+<p:sld xmlns:a="http://schemas.openxmlformats.org/drawingml/2006/main" xmlns:p="http://schemas.openxmlformats.org/presentationml/2006/main" xmlns:r="http://schemas.openxmlformats.org/officeDocument/2006/relationships">
+  <p:cSld>
+    <p:spTree>
+      <p:nvGrpSpPr>
+        <p:cNvPr id="1" name=""/>
+        <p:cNvGrpSpPr/>
+        <p:nvPr/>
+      </p:nvGrpSpPr>
+      <p:grpSpPr/>
+      <p:sp>
+        <p:nvSpPr>
+          <p:cNvPr id="2" name="TextBox 1"/>
+          <p:cNvSpPr txBox="1"/>
+          <p:nvPr/>
+        </p:nvSpPr>
+        <p:spPr>
+          <a:xfrm>
+            <a:off x="457200" y="320040"/>
+            <a:ext cx="8229600" cy="822960"/>
+          </a:xfrm>
+          <a:prstGeom prst="rect">
+            <a:avLst/>
+          </a:prstGeom>
+          <a:noFill/>
+        </p:spPr>
+        <p:txBody>
+          <a:bodyPr wrap="square">
+            <a:spAutoFit/>
+          </a:bodyPr>
+          <a:lstStyle/>
+          <a:p>
+            <a:r>
+              <a:rPr sz="2600" b="1">
+                <a:solidFill>
+                  <a:srgbClr val="0B3D2E"/>
+                </a:solidFill>
+              </a:rPr>
+              <a:t>⚠️ Errores comunes</a:t>
+            </a:r>
+          </a:p>
+        </p:txBody>
+      </p:sp>
+      <p:sp>
+        <p:nvSpPr>
+          <p:cNvPr id="3" name="TextBox 2"/>
+          <p:cNvSpPr txBox="1"/>
+          <p:nvPr/>
+        </p:nvSpPr>
+        <p:spPr>
+          <a:xfrm>
+            <a:off x="457200" y="1280160"/>
+            <a:ext cx="8229600" cy="4937760"/>
+          </a:xfrm>
+          <a:prstGeom prst="rect">
+            <a:avLst/>
+          </a:prstGeom>
+          <a:noFill/>
+        </p:spPr>
+        <p:txBody>
+          <a:bodyPr wrap="square">
+            <a:spAutoFit/>
+          </a:bodyPr>
+          <a:lstStyle/>
+          <a:p>
+            <a:pPr>
+              <a:spcAft>
+                <a:spcPts val="600"/>
+              </a:spcAft>
+            </a:pPr>
+            <a:r>
+              <a:rPr sz="1500">
+                <a:solidFill>
+                  <a:srgbClr val="22282E"/>
+                </a:solidFill>
+              </a:rPr>
+              <a:t>•  "No llegan logs al SIEM" — Agente/forwarder mal configurado; revisa conectividad e índices.</a:t>
+            </a:r>
+          </a:p>
+          <a:p>
+            <a:pPr>
+              <a:spcAft>
+                <a:spcPts val="600"/>
+              </a:spcAft>
+            </a:pPr>
+            <a:r>
+              <a:rPr sz="1500">
+                <a:solidFill>
+                  <a:srgbClr val="22282E"/>
+                </a:solidFill>
+              </a:rPr>
+              <a:t>•  "Sysmon no captura línea de comandos" — Config mínima; usa una config de referencia completa.</a:t>
+            </a:r>
+          </a:p>
+          <a:p>
+            <a:pPr>
+              <a:spcAft>
+                <a:spcPts val="600"/>
+              </a:spcAft>
+            </a:pPr>
+            <a:r>
+              <a:rPr sz="1500">
+                <a:solidFill>
+                  <a:srgbClr val="22282E"/>
+                </a:solidFill>
+              </a:rPr>
+              <a:t>•  "Demasiadas alertas" — Reglas sin ajustar; añade excepciones y umbrales.</a:t>
+            </a:r>
+          </a:p>
+          <a:p>
+            <a:pPr>
+              <a:spcAft>
+                <a:spcPts val="600"/>
+              </a:spcAft>
+            </a:pPr>
+            <a:r>
+              <a:rPr sz="1500">
+                <a:solidFill>
+                  <a:srgbClr val="22282E"/>
+                </a:solidFill>
+              </a:rPr>
+              <a:t>•  "La regla Sigma no traduce" — Backend incorrecto en sigmac; especifica el SIEM destino.</a:t>
+            </a:r>
+          </a:p>
+          <a:p>
+            <a:pPr>
+              <a:spcAft>
+                <a:spcPts val="600"/>
+              </a:spcAft>
+            </a:pPr>
+            <a:r>
+              <a:rPr sz="1500">
+                <a:solidFill>
+                  <a:srgbClr val="22282E"/>
+                </a:solidFill>
+              </a:rPr>
+              <a:t>•  "No detecto nada del ataque" — Telemetría incompleta; verifica qué eventos genera cada técnica.</a:t>
+            </a:r>
+          </a:p>
+        </p:txBody>
+      </p:sp>
+    </p:spTree>
+  </p:cSld>
+  <p:clrMapOvr>
+    <a:masterClrMapping/>
+  </p:clrMapOvr>
+</p:sld>
+</file>
+
+<file path=ppt/slides/slide14.xml><?xml version="1.0" encoding="utf-8"?>
+<p:sld xmlns:a="http://schemas.openxmlformats.org/drawingml/2006/main" xmlns:p="http://schemas.openxmlformats.org/presentationml/2006/main" xmlns:r="http://schemas.openxmlformats.org/officeDocument/2006/relationships">
+  <p:cSld>
+    <p:spTree>
+      <p:nvGrpSpPr>
+        <p:cNvPr id="1" name=""/>
+        <p:cNvGrpSpPr/>
+        <p:nvPr/>
+      </p:nvGrpSpPr>
+      <p:grpSpPr/>
+      <p:sp>
+        <p:nvSpPr>
+          <p:cNvPr id="2" name="TextBox 1"/>
+          <p:cNvSpPr txBox="1"/>
+          <p:nvPr/>
+        </p:nvSpPr>
+        <p:spPr>
+          <a:xfrm>
+            <a:off x="457200" y="320040"/>
+            <a:ext cx="8229600" cy="822960"/>
+          </a:xfrm>
+          <a:prstGeom prst="rect">
+            <a:avLst/>
+          </a:prstGeom>
+          <a:noFill/>
+        </p:spPr>
+        <p:txBody>
+          <a:bodyPr wrap="square">
+            <a:spAutoFit/>
+          </a:bodyPr>
+          <a:lstStyle/>
+          <a:p>
+            <a:r>
+              <a:rPr sz="2600" b="1">
+                <a:solidFill>
+                  <a:srgbClr val="0B3D2E"/>
+                </a:solidFill>
+              </a:rPr>
+              <a:t>❓ Preguntas frecuentes</a:t>
+            </a:r>
+          </a:p>
+        </p:txBody>
+      </p:sp>
+      <p:sp>
+        <p:nvSpPr>
+          <p:cNvPr id="3" name="TextBox 2"/>
+          <p:cNvSpPr txBox="1"/>
+          <p:nvPr/>
+        </p:nvSpPr>
+        <p:spPr>
+          <a:xfrm>
+            <a:off x="457200" y="1280160"/>
+            <a:ext cx="8229600" cy="4937760"/>
+          </a:xfrm>
+          <a:prstGeom prst="rect">
+            <a:avLst/>
+          </a:prstGeom>
+          <a:noFill/>
+        </p:spPr>
+        <p:txBody>
+          <a:bodyPr wrap="square">
+            <a:spAutoFit/>
+          </a:bodyPr>
+          <a:lstStyle/>
+          <a:p>
+            <a:pPr>
+              <a:spcAft>
+                <a:spcPts val="600"/>
+              </a:spcAft>
+            </a:pPr>
+            <a:r>
+              <a:rPr sz="1500">
+                <a:solidFill>
+                  <a:srgbClr val="22282E"/>
+                </a:solidFill>
+              </a:rPr>
+              <a:t>•  ❓ ¿Wazuh o Elastic?</a:t>
+            </a:r>
+          </a:p>
+          <a:p>
+            <a:pPr>
+              <a:spcAft>
+                <a:spcPts val="600"/>
+              </a:spcAft>
+            </a:pPr>
+            <a:r>
+              <a:rPr sz="1500">
+                <a:solidFill>
+                  <a:srgbClr val="22282E"/>
+                </a:solidFill>
+              </a:rPr>
+              <a:t>•  Wazuh es más rápido de montar y trae reglas; Elastic es más flexible. Cualquiera vale para el capstone.</a:t>
+            </a:r>
+          </a:p>
+          <a:p>
+            <a:pPr>
+              <a:spcAft>
+                <a:spcPts val="600"/>
+              </a:spcAft>
+            </a:pPr>
+            <a:r>
+              <a:rPr sz="1500">
+                <a:solidFill>
+                  <a:srgbClr val="22282E"/>
+                </a:solidFill>
+              </a:rPr>
+              <a:t>•  ❓ ¿Qué config de Sysmon uso?</a:t>
+            </a:r>
+          </a:p>
+          <a:p>
+            <a:pPr>
+              <a:spcAft>
+                <a:spcPts val="600"/>
+              </a:spcAft>
+            </a:pPr>
+            <a:r>
+              <a:rPr sz="1500">
+                <a:solidFill>
+                  <a:srgbClr val="22282E"/>
+                </a:solidFill>
+              </a:rPr>
+              <a:t>•  Parte de la de SwiftOnSecurity u Olaf Hartong y ajústala; evita la config por defecto (casi vacía).</a:t>
+            </a:r>
+          </a:p>
+          <a:p>
+            <a:pPr>
+              <a:spcAft>
+                <a:spcPts val="600"/>
+              </a:spcAft>
+            </a:pPr>
+            <a:r>
+              <a:rPr sz="1500">
+                <a:solidFill>
+                  <a:srgbClr val="22282E"/>
+                </a:solidFill>
+              </a:rPr>
+              <a:t>•  ❓ ¿Cómo priorizo qué detectar?</a:t>
+            </a:r>
+          </a:p>
+          <a:p>
+            <a:pPr>
+              <a:spcAft>
+                <a:spcPts val="600"/>
+              </a:spcAft>
+            </a:pPr>
+            <a:r>
+              <a:rPr sz="1500">
+                <a:solidFill>
+                  <a:srgbClr val="22282E"/>
+                </a:solidFill>
+              </a:rPr>
+              <a:t>•  Empieza por las técnicas que usaste en la Clase 305 y por las de mayor impacto (ejecución, credenciales, persistencia).</a:t>
+            </a:r>
+          </a:p>
+          <a:p>
+            <a:pPr>
+              <a:spcAft>
+                <a:spcPts val="600"/>
+              </a:spcAft>
+            </a:pPr>
+            <a:r>
+              <a:rPr sz="1500">
+                <a:solidFill>
+                  <a:srgbClr val="22282E"/>
+                </a:solidFill>
+              </a:rPr>
+              <a:t>•  ❓ ¿Detección al 100%?</a:t>
+            </a:r>
+          </a:p>
+        </p:txBody>
+      </p:sp>
+    </p:spTree>
+  </p:cSld>
+  <p:clrMapOvr>
+    <a:masterClrMapping/>
+  </p:clrMapOvr>
+</p:sld>
+</file>
+
+<file path=ppt/slides/slide15.xml><?xml version="1.0" encoding="utf-8"?>
+<p:sld xmlns:a="http://schemas.openxmlformats.org/drawingml/2006/main" xmlns:p="http://schemas.openxmlformats.org/presentationml/2006/main" xmlns:r="http://schemas.openxmlformats.org/officeDocument/2006/relationships">
+  <p:cSld>
+    <p:spTree>
+      <p:nvGrpSpPr>
+        <p:cNvPr id="1" name=""/>
+        <p:cNvGrpSpPr/>
+        <p:nvPr/>
+      </p:nvGrpSpPr>
+      <p:grpSpPr/>
+      <p:sp>
+        <p:nvSpPr>
+          <p:cNvPr id="2" name="TextBox 1"/>
+          <p:cNvSpPr txBox="1"/>
+          <p:nvPr/>
+        </p:nvSpPr>
+        <p:spPr>
+          <a:xfrm>
+            <a:off x="457200" y="320040"/>
+            <a:ext cx="8229600" cy="822960"/>
+          </a:xfrm>
+          <a:prstGeom prst="rect">
+            <a:avLst/>
+          </a:prstGeom>
+          <a:noFill/>
+        </p:spPr>
+        <p:txBody>
+          <a:bodyPr wrap="square">
+            <a:spAutoFit/>
+          </a:bodyPr>
+          <a:lstStyle/>
+          <a:p>
+            <a:r>
+              <a:rPr sz="2600" b="1">
+                <a:solidFill>
+                  <a:srgbClr val="0B3D2E"/>
+                </a:solidFill>
+              </a:rPr>
+              <a:t>🔗 Referencias</a:t>
+            </a:r>
+          </a:p>
+        </p:txBody>
+      </p:sp>
+      <p:sp>
+        <p:nvSpPr>
+          <p:cNvPr id="3" name="TextBox 2"/>
+          <p:cNvSpPr txBox="1"/>
+          <p:nvPr/>
+        </p:nvSpPr>
+        <p:spPr>
+          <a:xfrm>
+            <a:off x="457200" y="1280160"/>
+            <a:ext cx="8229600" cy="4937760"/>
+          </a:xfrm>
+          <a:prstGeom prst="rect">
+            <a:avLst/>
+          </a:prstGeom>
+          <a:noFill/>
+        </p:spPr>
+        <p:txBody>
+          <a:bodyPr wrap="square">
+            <a:spAutoFit/>
+          </a:bodyPr>
+          <a:lstStyle/>
+          <a:p>
+            <a:pPr>
+              <a:spcAft>
+                <a:spcPts val="600"/>
+              </a:spcAft>
+            </a:pPr>
+            <a:r>
+              <a:rPr sz="1500">
+                <a:solidFill>
+                  <a:srgbClr val="22282E"/>
+                </a:solidFill>
+              </a:rPr>
               <a:t>•  MITRE ATT&amp;CK®: &lt;https://attack.mitre.org/&gt;</a:t>
             </a:r>
           </a:p>
@@ -3629,6 +4080,81 @@
           </a:p>
         </p:txBody>
       </p:sp>
+    </p:spTree>
+  </p:cSld>
+  <p:clrMapOvr>
+    <a:masterClrMapping/>
+  </p:clrMapOvr>
+</p:sld>
+</file>
+
+<file path=ppt/slides/slide16.xml><?xml version="1.0" encoding="utf-8"?>
+<p:sld xmlns:a="http://schemas.openxmlformats.org/drawingml/2006/main" xmlns:p="http://schemas.openxmlformats.org/presentationml/2006/main" xmlns:r="http://schemas.openxmlformats.org/officeDocument/2006/relationships">
+  <p:cSld>
+    <p:spTree>
+      <p:nvGrpSpPr>
+        <p:cNvPr id="1" name=""/>
+        <p:cNvGrpSpPr/>
+        <p:nvPr/>
+      </p:nvGrpSpPr>
+      <p:grpSpPr/>
+      <p:sp>
+        <p:nvSpPr>
+          <p:cNvPr id="2" name="TextBox 1"/>
+          <p:cNvSpPr txBox="1"/>
+          <p:nvPr/>
+        </p:nvSpPr>
+        <p:spPr>
+          <a:xfrm>
+            <a:off x="457200" y="274320"/>
+            <a:ext cx="8229600" cy="640080"/>
+          </a:xfrm>
+          <a:prstGeom prst="rect">
+            <a:avLst/>
+          </a:prstGeom>
+          <a:noFill/>
+        </p:spPr>
+        <p:txBody>
+          <a:bodyPr wrap="square">
+            <a:spAutoFit/>
+          </a:bodyPr>
+          <a:lstStyle/>
+          <a:p>
+            <a:r>
+              <a:rPr sz="2200" b="1">
+                <a:solidFill>
+                  <a:srgbClr val="0B3D2E"/>
+                </a:solidFill>
+              </a:rPr>
+              <a:t>Diagrama de la clase</a:t>
+            </a:r>
+          </a:p>
+        </p:txBody>
+      </p:sp>
+      <p:pic>
+        <p:nvPicPr>
+          <p:cNvPr id="3" name="Picture 2" descr="dff56bb524da5813.png"/>
+          <p:cNvPicPr>
+            <a:picLocks noChangeAspect="1"/>
+          </p:cNvPicPr>
+          <p:nvPr/>
+        </p:nvPicPr>
+        <p:blipFill>
+          <a:blip r:embed="rId2"/>
+          <a:stretch>
+            <a:fillRect/>
+          </a:stretch>
+        </p:blipFill>
+        <p:spPr>
+          <a:xfrm>
+            <a:off x="457200" y="3331597"/>
+            <a:ext cx="8229600" cy="834886"/>
+          </a:xfrm>
+          <a:prstGeom prst="rect">
+            <a:avLst/>
+          </a:prstGeom>
+        </p:spPr>
+      </p:pic>
     </p:spTree>
   </p:cSld>
   <p:clrMapOvr>
@@ -3713,7 +4239,7 @@
                   <a:srgbClr val="22282E"/>
                 </a:solidFill>
               </a:rPr>
-              <a:t>•  Construir una capacidad de detección Blue Team end-to-end: instrumentar hosts y red, centralizar logs en un SIEM, escribir reglas de detección, generar alertas y medir la cobertura ATT&amp;CK frente a la operación Red Team de la Clase 305. Integra las Partes 10 (SIEM/logging), 11 (threat hunting) y 12 (IR) en un proyecto verificable que demuestra que "ves" al adversario.</a:t>
+              <a:t>•  Construir una capacidad de detección Blue Team end-to-end: instrumentar hosts y red, centralizar logs en un SIEM, escribir reglas de detección, generar alertas y medir la cobertura ATT&amp;CK frente a la…</a:t>
             </a:r>
           </a:p>
         </p:txBody>
@@ -4107,7 +4633,7 @@
                   <a:srgbClr val="0B3D2E"/>
                 </a:solidFill>
               </a:rPr>
-              <a:t>📖 Definiciones y características</a:t>
+              <a:t>🧠 Explicación en profundidad</a:t>
             </a:r>
           </a:p>
         </p:txBody>
@@ -4145,82 +4671,22 @@
                   <a:srgbClr val="22282E"/>
                 </a:solidFill>
               </a:rPr>
-              <a:t>•  Sysmon: sensor de eventos de Windows (procesos, red, hashes). Característica: telemetría rica y configurable por XML.</a:t>
-            </a:r>
-          </a:p>
-          <a:p>
-            <a:pPr>
-              <a:spcAft>
-                <a:spcPts val="600"/>
-              </a:spcAft>
-            </a:pPr>
-            <a:r>
-              <a:rPr sz="1500">
-                <a:solidFill>
-                  <a:srgbClr val="22282E"/>
-                </a:solidFill>
-              </a:rPr>
-              <a:t>•  SIEM: plataforma de agregación y correlación de logs. Característica: centraliza y permite búsquedas.</a:t>
-            </a:r>
-          </a:p>
-          <a:p>
-            <a:pPr>
-              <a:spcAft>
-                <a:spcPts val="600"/>
-              </a:spcAft>
-            </a:pPr>
-            <a:r>
-              <a:rPr sz="1500">
-                <a:solidFill>
-                  <a:srgbClr val="22282E"/>
-                </a:solidFill>
-              </a:rPr>
-              <a:t>•  Regla Sigma: firma de detección en YAML agnóstica del SIEM. Característica: se traduce a la query nativa del backend.</a:t>
-            </a:r>
-          </a:p>
-          <a:p>
-            <a:pPr>
-              <a:spcAft>
-                <a:spcPts val="600"/>
-              </a:spcAft>
-            </a:pPr>
-            <a:r>
-              <a:rPr sz="1500">
-                <a:solidFill>
-                  <a:srgbClr val="22282E"/>
-                </a:solidFill>
-              </a:rPr>
-              <a:t>•  Cobertura ATT&amp;CK: proporción de técnicas que sabes detectar. Característica: se visualiza en Navigator.</a:t>
-            </a:r>
-          </a:p>
-          <a:p>
-            <a:pPr>
-              <a:spcAft>
-                <a:spcPts val="600"/>
-              </a:spcAft>
-            </a:pPr>
-            <a:r>
-              <a:rPr sz="1500">
-                <a:solidFill>
-                  <a:srgbClr val="22282E"/>
-                </a:solidFill>
-              </a:rPr>
-              <a:t>•  MTTD (Mean Time To Detect): tiempo medio hasta detectar. Característica: métrica clave de un SOC.</a:t>
-            </a:r>
-          </a:p>
-          <a:p>
-            <a:pPr>
-              <a:spcAft>
-                <a:spcPts val="600"/>
-              </a:spcAft>
-            </a:pPr>
-            <a:r>
-              <a:rPr sz="1500">
-                <a:solidFill>
-                  <a:srgbClr val="22282E"/>
-                </a:solidFill>
-              </a:rPr>
-              <a:t>•  Falso positivo: alerta sin amenaza real. Característica: erosiona la confianza; hay que ajustar reglas.</a:t>
+              <a:t>•  Detectar exige hipótesis, fuente, lógica, pruebas positivas y negativas, triage y mantenimiento. Una alerta aislada no demuestra cobertura. La clase convierte el objetivo en una evidencia evaluable…</a:t>
+            </a:r>
+          </a:p>
+          <a:p>
+            <a:pPr>
+              <a:spcAft>
+                <a:spcPts val="600"/>
+              </a:spcAft>
+            </a:pPr>
+            <a:r>
+              <a:rPr sz="1500">
+                <a:solidFill>
+                  <a:srgbClr val="22282E"/>
+                </a:solidFill>
+              </a:rPr>
+              <a:t>•  La regla detecta el laboratorio pero falla con campos nulos. El alumno añade variantes y mide falsos positivos.</a:t>
             </a:r>
           </a:p>
         </p:txBody>
@@ -4271,7 +4737,7 @@
                   <a:srgbClr val="0B3D2E"/>
                 </a:solidFill>
               </a:rPr>
-              <a:t>🧰 Herramientas y preparación</a:t>
+              <a:t>📔 Glosario operativo</a:t>
             </a:r>
           </a:p>
         </p:txBody>
@@ -4309,67 +4775,52 @@
                   <a:srgbClr val="22282E"/>
                 </a:solidFill>
               </a:rPr>
-              <a:t>•  SIEM de laboratorio: Wazuh o Elastic Stack (Elasticsearch + Kibana).</a:t>
-            </a:r>
-          </a:p>
-          <a:p>
-            <a:pPr>
-              <a:spcAft>
-                <a:spcPts val="600"/>
-              </a:spcAft>
-            </a:pPr>
-            <a:r>
-              <a:rPr sz="1500">
-                <a:solidFill>
-                  <a:srgbClr val="22282E"/>
-                </a:solidFill>
-              </a:rPr>
-              <a:t>•  Telemetría: Sysmon con una config de referencia (SwiftOnSecurity/Olaf Hartong) y auditd en Linux.</a:t>
-            </a:r>
-          </a:p>
-          <a:p>
-            <a:pPr>
-              <a:spcAft>
-                <a:spcPts val="600"/>
-              </a:spcAft>
-            </a:pPr>
-            <a:r>
-              <a:rPr sz="1500">
-                <a:solidFill>
-                  <a:srgbClr val="22282E"/>
-                </a:solidFill>
-              </a:rPr>
-              <a:t>•  Detección: Sigma + sigmac/sigma-cli, reglas de la comunidad.</a:t>
-            </a:r>
-          </a:p>
-          <a:p>
-            <a:pPr>
-              <a:spcAft>
-                <a:spcPts val="600"/>
-              </a:spcAft>
-            </a:pPr>
-            <a:r>
-              <a:rPr sz="1500">
-                <a:solidFill>
-                  <a:srgbClr val="22282E"/>
-                </a:solidFill>
-              </a:rPr>
-              <a:t>•  Datos: los eventos generados por el capstone Red Team (Clase 305).</a:t>
-            </a:r>
-          </a:p>
-          <a:p>
-            <a:pPr>
-              <a:spcAft>
-                <a:spcPts val="600"/>
-              </a:spcAft>
-            </a:pPr>
-            <a:r>
-              <a:rPr sz="1500">
-                <a:solidFill>
-                  <a:srgbClr val="22282E"/>
-                </a:solidFill>
-              </a:rPr>
-              <a:t>•  ATT&amp;CK Navigator para el mapa de cobertura.</a:t>
+              <a:t>•  Término — Definición</a:t>
+            </a:r>
+          </a:p>
+          <a:p>
+            <a:pPr>
+              <a:spcAft>
+                <a:spcPts val="600"/>
+              </a:spcAft>
+            </a:pPr>
+            <a:r>
+              <a:rPr sz="1500">
+                <a:solidFill>
+                  <a:srgbClr val="22282E"/>
+                </a:solidFill>
+              </a:rPr>
+              <a:t>•  Cobertura — Alcance demostrado frente a comportamientos y fuentes definidos.</a:t>
+            </a:r>
+          </a:p>
+          <a:p>
+            <a:pPr>
+              <a:spcAft>
+                <a:spcPts val="600"/>
+              </a:spcAft>
+            </a:pPr>
+            <a:r>
+              <a:rPr sz="1500">
+                <a:solidFill>
+                  <a:srgbClr val="22282E"/>
+                </a:solidFill>
+              </a:rPr>
+              <a:t>•  Evidencia — Resultado que otra persona puede revisar y relacionar con un criterio.</a:t>
+            </a:r>
+          </a:p>
+          <a:p>
+            <a:pPr>
+              <a:spcAft>
+                <a:spcPts val="600"/>
+              </a:spcAft>
+            </a:pPr>
+            <a:r>
+              <a:rPr sz="1500">
+                <a:solidFill>
+                  <a:srgbClr val="22282E"/>
+                </a:solidFill>
+              </a:rPr>
+              <a:t>•  Retrospectiva — Revisión de decisiones, límites y siguiente mejora.</a:t>
             </a:r>
           </a:p>
         </p:txBody>
@@ -4420,7 +4871,7 @@
                   <a:srgbClr val="0B3D2E"/>
                 </a:solidFill>
               </a:rPr>
-              <a:t>🧪 Laboratorio guiado</a:t>
+              <a:t>✅ Criterio de dominio</a:t>
             </a:r>
           </a:p>
         </p:txBody>
@@ -4458,97 +4909,7 @@
                   <a:srgbClr val="22282E"/>
                 </a:solidFill>
               </a:rPr>
-              <a:t>•  Instrumenta. Despliega Sysmon con una config de referencia en los hosts Windows y auditd con reglas clave en Linux.</a:t>
-            </a:r>
-          </a:p>
-          <a:p>
-            <a:pPr>
-              <a:spcAft>
-                <a:spcPts val="600"/>
-              </a:spcAft>
-            </a:pPr>
-            <a:r>
-              <a:rPr sz="1500">
-                <a:solidFill>
-                  <a:srgbClr val="22282E"/>
-                </a:solidFill>
-              </a:rPr>
-              <a:t>•  Centraliza. Instala Wazuh/Elastic y envía los logs de todos los hosts; verifica la ingesta en Kibana.</a:t>
-            </a:r>
-          </a:p>
-          <a:p>
-            <a:pPr>
-              <a:spcAft>
-                <a:spcPts val="600"/>
-              </a:spcAft>
-            </a:pPr>
-            <a:r>
-              <a:rPr sz="1500">
-                <a:solidFill>
-                  <a:srgbClr val="22282E"/>
-                </a:solidFill>
-              </a:rPr>
-              <a:t>•  Normaliza. Comprueba que campos clave (proceso, línea de comandos, hash, usuario) llegan parseados.</a:t>
-            </a:r>
-          </a:p>
-          <a:p>
-            <a:pPr>
-              <a:spcAft>
-                <a:spcPts val="600"/>
-              </a:spcAft>
-            </a:pPr>
-            <a:r>
-              <a:rPr sz="1500">
-                <a:solidFill>
-                  <a:srgbClr val="22282E"/>
-                </a:solidFill>
-              </a:rPr>
-              <a:t>•  Despliega reglas Sigma. Importa reglas para técnicas del ataque (p. ej. T1059 ejecución por línea de comandos, T1003 volcado de credenciales, T1021 movimiento lateral).</a:t>
-            </a:r>
-          </a:p>
-          <a:p>
-            <a:pPr>
-              <a:spcAft>
-                <a:spcPts val="600"/>
-              </a:spcAft>
-            </a:pPr>
-            <a:r>
-              <a:rPr sz="1500">
-                <a:solidFill>
-                  <a:srgbClr val="22282E"/>
-                </a:solidFill>
-              </a:rPr>
-              <a:t>•  Reproduce el ataque. Vuelve a lanzar (o usa los logs de) la operación Red Team de la Clase 305.</a:t>
-            </a:r>
-          </a:p>
-          <a:p>
-            <a:pPr>
-              <a:spcAft>
-                <a:spcPts val="600"/>
-              </a:spcAft>
-            </a:pPr>
-            <a:r>
-              <a:rPr sz="1500">
-                <a:solidFill>
-                  <a:srgbClr val="22282E"/>
-                </a:solidFill>
-              </a:rPr>
-              <a:t>•  Valida detecciones. Confirma qué técnicas generaron alerta y cuáles pasaron desapercibidas.</a:t>
-            </a:r>
-          </a:p>
-          <a:p>
-            <a:pPr>
-              <a:spcAft>
-                <a:spcPts val="600"/>
-              </a:spcAft>
-            </a:pPr>
-            <a:r>
-              <a:rPr sz="1500">
-                <a:solidFill>
-                  <a:srgbClr val="22282E"/>
-                </a:solidFill>
-              </a:rPr>
-              <a:t>•  Caza lo no detectado. Para las técnicas sin alerta, escribe una query de hunting y, si procede, una regla nueva.</a:t>
+              <a:t>•  El alumno domina la clase cuando planifica, ejecuta y comunica una evidencia completa, respeta alcance y puede defender sus decisiones ante una revisión.</a:t>
             </a:r>
           </a:p>
         </p:txBody>
@@ -4599,7 +4960,7 @@
                   <a:srgbClr val="0B3D2E"/>
                 </a:solidFill>
               </a:rPr>
-              <a:t>✍️ Ejercicios</a:t>
+              <a:t>📖 Definiciones y características</a:t>
             </a:r>
           </a:p>
         </p:txBody>
@@ -4637,82 +4998,82 @@
                   <a:srgbClr val="22282E"/>
                 </a:solidFill>
               </a:rPr>
-              <a:t>•  Escribe una regla Sigma para detección de mimikatz/volcado de LSASS.</a:t>
-            </a:r>
-          </a:p>
-          <a:p>
-            <a:pPr>
-              <a:spcAft>
-                <a:spcPts val="600"/>
-              </a:spcAft>
-            </a:pPr>
-            <a:r>
-              <a:rPr sz="1500">
-                <a:solidFill>
-                  <a:srgbClr val="22282E"/>
-                </a:solidFill>
-              </a:rPr>
-              <a:t>•  Ajusta una regla ruidosa para reducir falsos positivos.</a:t>
-            </a:r>
-          </a:p>
-          <a:p>
-            <a:pPr>
-              <a:spcAft>
-                <a:spcPts val="600"/>
-              </a:spcAft>
-            </a:pPr>
-            <a:r>
-              <a:rPr sz="1500">
-                <a:solidFill>
-                  <a:srgbClr val="22282E"/>
-                </a:solidFill>
-              </a:rPr>
-              <a:t>•  Crea un dashboard con las alertas por técnica ATT&amp;CK.</a:t>
-            </a:r>
-          </a:p>
-          <a:p>
-            <a:pPr>
-              <a:spcAft>
-                <a:spcPts val="600"/>
-              </a:spcAft>
-            </a:pPr>
-            <a:r>
-              <a:rPr sz="1500">
-                <a:solidFill>
-                  <a:srgbClr val="22282E"/>
-                </a:solidFill>
-              </a:rPr>
-              <a:t>•  Compara la cobertura antes y después de añadir 3 reglas.</a:t>
-            </a:r>
-          </a:p>
-          <a:p>
-            <a:pPr>
-              <a:spcAft>
-                <a:spcPts val="600"/>
-              </a:spcAft>
-            </a:pPr>
-            <a:r>
-              <a:rPr sz="1500">
-                <a:solidFill>
-                  <a:srgbClr val="22282E"/>
-                </a:solidFill>
-              </a:rPr>
-              <a:t>•  Redacta una query de hunting para movimiento lateral por SMB.</a:t>
-            </a:r>
-          </a:p>
-          <a:p>
-            <a:pPr>
-              <a:spcAft>
-                <a:spcPts val="600"/>
-              </a:spcAft>
-            </a:pPr>
-            <a:r>
-              <a:rPr sz="1500">
-                <a:solidFill>
-                  <a:srgbClr val="22282E"/>
-                </a:solidFill>
-              </a:rPr>
-              <a:t>•  Calcula el MTTD de tres técnicas del ataque.</a:t>
+              <a:t>•  Sysmon: sensor de eventos de Windows (procesos, red, hashes). Característica: telemetría rica y configurable por XML.</a:t>
+            </a:r>
+          </a:p>
+          <a:p>
+            <a:pPr>
+              <a:spcAft>
+                <a:spcPts val="600"/>
+              </a:spcAft>
+            </a:pPr>
+            <a:r>
+              <a:rPr sz="1500">
+                <a:solidFill>
+                  <a:srgbClr val="22282E"/>
+                </a:solidFill>
+              </a:rPr>
+              <a:t>•  SIEM: plataforma de agregación y correlación de logs. Característica: centraliza y permite búsquedas.</a:t>
+            </a:r>
+          </a:p>
+          <a:p>
+            <a:pPr>
+              <a:spcAft>
+                <a:spcPts val="600"/>
+              </a:spcAft>
+            </a:pPr>
+            <a:r>
+              <a:rPr sz="1500">
+                <a:solidFill>
+                  <a:srgbClr val="22282E"/>
+                </a:solidFill>
+              </a:rPr>
+              <a:t>•  Regla Sigma: firma de detección en YAML agnóstica del SIEM. Característica: se traduce a la query nativa del backend.</a:t>
+            </a:r>
+          </a:p>
+          <a:p>
+            <a:pPr>
+              <a:spcAft>
+                <a:spcPts val="600"/>
+              </a:spcAft>
+            </a:pPr>
+            <a:r>
+              <a:rPr sz="1500">
+                <a:solidFill>
+                  <a:srgbClr val="22282E"/>
+                </a:solidFill>
+              </a:rPr>
+              <a:t>•  Cobertura ATT&amp;CK: proporción de técnicas que sabes detectar. Característica: se visualiza en Navigator.</a:t>
+            </a:r>
+          </a:p>
+          <a:p>
+            <a:pPr>
+              <a:spcAft>
+                <a:spcPts val="600"/>
+              </a:spcAft>
+            </a:pPr>
+            <a:r>
+              <a:rPr sz="1500">
+                <a:solidFill>
+                  <a:srgbClr val="22282E"/>
+                </a:solidFill>
+              </a:rPr>
+              <a:t>•  MTTD (Mean Time To Detect): tiempo medio hasta detectar. Característica: métrica clave de un SOC.</a:t>
+            </a:r>
+          </a:p>
+          <a:p>
+            <a:pPr>
+              <a:spcAft>
+                <a:spcPts val="600"/>
+              </a:spcAft>
+            </a:pPr>
+            <a:r>
+              <a:rPr sz="1500">
+                <a:solidFill>
+                  <a:srgbClr val="22282E"/>
+                </a:solidFill>
+              </a:rPr>
+              <a:t>•  Falso positivo: alerta sin amenaza real. Característica: erosiona la confianza; hay que ajustar reglas.</a:t>
             </a:r>
           </a:p>
         </p:txBody>
@@ -4763,7 +5124,7 @@
                   <a:srgbClr val="0B3D2E"/>
                 </a:solidFill>
               </a:rPr>
-              <a:t>📝 Reto verificable</a:t>
+              <a:t>🧰 Herramientas y preparación</a:t>
             </a:r>
           </a:p>
         </p:txBody>
@@ -4801,22 +5162,67 @@
                   <a:srgbClr val="22282E"/>
                 </a:solidFill>
               </a:rPr>
-              <a:t>•  Entrega un informe de detección Blue Team (informe-blueteam.md) con: arquitectura de telemetría y SIEM, al menos 5 reglas Sigma desplegadas, la validación contra el ataque de la Clase 305, un mapa de cobertura ATT&amp;CK (Navigator) y un plan para cerrar los gaps ciegos.</a:t>
-            </a:r>
-          </a:p>
-          <a:p>
-            <a:pPr>
-              <a:spcAft>
-                <a:spcPts val="600"/>
-              </a:spcAft>
-            </a:pPr>
-            <a:r>
-              <a:rPr sz="1500">
-                <a:solidFill>
-                  <a:srgbClr val="22282E"/>
-                </a:solidFill>
-              </a:rPr>
-              <a:t>•  Criterio de aceptación: al menos 5 técnicas del ataque están detectadas y evidenciadas con capturas de alerta, el mapa de cobertura distingue detectado/visible/ciego, y hay reglas nuevas escritas para al menos 2 gaps.</a:t>
+              <a:t>•  SIEM de laboratorio: Wazuh o Elastic Stack (Elasticsearch + Kibana).</a:t>
+            </a:r>
+          </a:p>
+          <a:p>
+            <a:pPr>
+              <a:spcAft>
+                <a:spcPts val="600"/>
+              </a:spcAft>
+            </a:pPr>
+            <a:r>
+              <a:rPr sz="1500">
+                <a:solidFill>
+                  <a:srgbClr val="22282E"/>
+                </a:solidFill>
+              </a:rPr>
+              <a:t>•  Telemetría: Sysmon con una config de referencia (SwiftOnSecurity/Olaf Hartong) y auditd en Linux.</a:t>
+            </a:r>
+          </a:p>
+          <a:p>
+            <a:pPr>
+              <a:spcAft>
+                <a:spcPts val="600"/>
+              </a:spcAft>
+            </a:pPr>
+            <a:r>
+              <a:rPr sz="1500">
+                <a:solidFill>
+                  <a:srgbClr val="22282E"/>
+                </a:solidFill>
+              </a:rPr>
+              <a:t>•  Detección: Sigma + sigmac/sigma-cli, reglas de la comunidad.</a:t>
+            </a:r>
+          </a:p>
+          <a:p>
+            <a:pPr>
+              <a:spcAft>
+                <a:spcPts val="600"/>
+              </a:spcAft>
+            </a:pPr>
+            <a:r>
+              <a:rPr sz="1500">
+                <a:solidFill>
+                  <a:srgbClr val="22282E"/>
+                </a:solidFill>
+              </a:rPr>
+              <a:t>•  Datos: los eventos generados por el capstone Red Team (Clase 305).</a:t>
+            </a:r>
+          </a:p>
+          <a:p>
+            <a:pPr>
+              <a:spcAft>
+                <a:spcPts val="600"/>
+              </a:spcAft>
+            </a:pPr>
+            <a:r>
+              <a:rPr sz="1500">
+                <a:solidFill>
+                  <a:srgbClr val="22282E"/>
+                </a:solidFill>
+              </a:rPr>
+              <a:t>•  ATT&amp;CK Navigator para el mapa de cobertura.</a:t>
             </a:r>
           </a:p>
         </p:txBody>
